--- a/slides/Chapter 15 - Public Opinion and the Media (Lecture Deck).pptx
+++ b/slides/Chapter 15 - Public Opinion and the Media (Lecture Deck).pptx
@@ -8124,92 +8124,6 @@
           </a:p>
         </p:txBody>
       </p:sp>
-      <p:sp>
-        <p:nvSpPr>
-          <p:cNvPr id="18" name="Shape 15"/>
-          <p:cNvSpPr/>
-          <p:nvPr/>
-        </p:nvSpPr>
-        <p:spPr>
-          <a:xfrm>
-            <a:off x="594360" y="6217920"/>
-            <a:ext cx="11002975" cy="228600"/>
-          </a:xfrm>
-          <a:prstGeom prst="roundRect">
-            <a:avLst>
-              <a:gd name="adj" fmla="val 28000"/>
-            </a:avLst>
-          </a:prstGeom>
-          <a:solidFill>
-            <a:srgbClr val="FFFFFF"/>
-          </a:solidFill>
-          <a:ln w="19050">
-            <a:solidFill>
-              <a:srgbClr val="B07D2B"/>
-            </a:solidFill>
-            <a:prstDash val="solid"/>
-          </a:ln>
-        </p:spPr>
-      </p:sp>
-      <p:sp>
-        <p:nvSpPr>
-          <p:cNvPr id="19" name="Text 16"/>
-          <p:cNvSpPr txBox="1"/>
-          <p:nvPr/>
-        </p:nvSpPr>
-        <p:spPr>
-          <a:xfrm>
-            <a:off x="868680" y="6382512"/>
-            <a:ext cx="10454335" cy="329184"/>
-          </a:xfrm>
-          <a:prstGeom prst="rect">
-            <a:avLst/>
-          </a:prstGeom>
-          <a:noFill/>
-          <a:ln/>
-        </p:spPr>
-        <p:txBody>
-          <a:bodyPr wrap="square" lIns="0" tIns="0" rIns="0" bIns="0" rtlCol="0" anchor="ctr"/>
-          <a:lstStyle/>
-          <a:p>
-            <a:pPr indent="0" marL="0">
-              <a:buNone/>
-            </a:pPr>
-            <a:endParaRPr lang="en-US" sz="1400" dirty="0"/>
-          </a:p>
-        </p:txBody>
-      </p:sp>
-      <p:sp>
-        <p:nvSpPr>
-          <p:cNvPr id="20" name="Text 17"/>
-          <p:cNvSpPr txBox="1"/>
-          <p:nvPr/>
-        </p:nvSpPr>
-        <p:spPr>
-          <a:xfrm>
-            <a:off x="868680" y="6748272"/>
-            <a:ext cx="10454335" cy="-484632"/>
-          </a:xfrm>
-          <a:prstGeom prst="rect">
-            <a:avLst/>
-          </a:prstGeom>
-          <a:noFill/>
-          <a:ln/>
-        </p:spPr>
-        <p:txBody>
-          <a:bodyPr wrap="square" lIns="0" tIns="0" rIns="0" bIns="0" rtlCol="0" anchor="ctr"/>
-          <a:lstStyle/>
-          <a:p>
-            <a:pPr indent="0" marL="0">
-              <a:lnSpc>
-                <a:spcPts val="1700"/>
-              </a:lnSpc>
-              <a:buNone/>
-            </a:pPr>
-            <a:endParaRPr lang="en-US" sz="1250" dirty="0"/>
-          </a:p>
-        </p:txBody>
-      </p:sp>
     </p:spTree>
   </p:cSld>
   <p:clrMapOvr>
@@ -9420,92 +9334,6 @@
           </a:p>
         </p:txBody>
       </p:sp>
-      <p:sp>
-        <p:nvSpPr>
-          <p:cNvPr id="16" name="Shape 13"/>
-          <p:cNvSpPr/>
-          <p:nvPr/>
-        </p:nvSpPr>
-        <p:spPr>
-          <a:xfrm>
-            <a:off x="594360" y="5897880"/>
-            <a:ext cx="11002975" cy="548640"/>
-          </a:xfrm>
-          <a:prstGeom prst="roundRect">
-            <a:avLst>
-              <a:gd name="adj" fmla="val 11667"/>
-            </a:avLst>
-          </a:prstGeom>
-          <a:solidFill>
-            <a:srgbClr val="FFFFFF"/>
-          </a:solidFill>
-          <a:ln w="19050">
-            <a:solidFill>
-              <a:srgbClr val="B07D2B"/>
-            </a:solidFill>
-            <a:prstDash val="solid"/>
-          </a:ln>
-        </p:spPr>
-      </p:sp>
-      <p:sp>
-        <p:nvSpPr>
-          <p:cNvPr id="17" name="Text 14"/>
-          <p:cNvSpPr txBox="1"/>
-          <p:nvPr/>
-        </p:nvSpPr>
-        <p:spPr>
-          <a:xfrm>
-            <a:off x="868680" y="6062472"/>
-            <a:ext cx="10454335" cy="329184"/>
-          </a:xfrm>
-          <a:prstGeom prst="rect">
-            <a:avLst/>
-          </a:prstGeom>
-          <a:noFill/>
-          <a:ln/>
-        </p:spPr>
-        <p:txBody>
-          <a:bodyPr wrap="square" lIns="0" tIns="0" rIns="0" bIns="0" rtlCol="0" anchor="ctr"/>
-          <a:lstStyle/>
-          <a:p>
-            <a:pPr indent="0" marL="0">
-              <a:buNone/>
-            </a:pPr>
-            <a:endParaRPr lang="en-US" sz="1400" dirty="0"/>
-          </a:p>
-        </p:txBody>
-      </p:sp>
-      <p:sp>
-        <p:nvSpPr>
-          <p:cNvPr id="18" name="Text 15"/>
-          <p:cNvSpPr txBox="1"/>
-          <p:nvPr/>
-        </p:nvSpPr>
-        <p:spPr>
-          <a:xfrm>
-            <a:off x="868680" y="6428232"/>
-            <a:ext cx="10454335" cy="-164592"/>
-          </a:xfrm>
-          <a:prstGeom prst="rect">
-            <a:avLst/>
-          </a:prstGeom>
-          <a:noFill/>
-          <a:ln/>
-        </p:spPr>
-        <p:txBody>
-          <a:bodyPr wrap="square" lIns="0" tIns="0" rIns="0" bIns="0" rtlCol="0" anchor="ctr"/>
-          <a:lstStyle/>
-          <a:p>
-            <a:pPr indent="0" marL="0">
-              <a:lnSpc>
-                <a:spcPts val="1700"/>
-              </a:lnSpc>
-              <a:buNone/>
-            </a:pPr>
-            <a:endParaRPr lang="en-US" sz="1250" dirty="0"/>
-          </a:p>
-        </p:txBody>
-      </p:sp>
     </p:spTree>
   </p:cSld>
   <p:clrMapOvr>
@@ -10551,92 +10379,6 @@
           </a:p>
         </p:txBody>
       </p:sp>
-      <p:sp>
-        <p:nvSpPr>
-          <p:cNvPr id="16" name="Shape 13"/>
-          <p:cNvSpPr/>
-          <p:nvPr/>
-        </p:nvSpPr>
-        <p:spPr>
-          <a:xfrm>
-            <a:off x="594360" y="5989320"/>
-            <a:ext cx="11002975" cy="457200"/>
-          </a:xfrm>
-          <a:prstGeom prst="roundRect">
-            <a:avLst>
-              <a:gd name="adj" fmla="val 14000"/>
-            </a:avLst>
-          </a:prstGeom>
-          <a:solidFill>
-            <a:srgbClr val="FFFFFF"/>
-          </a:solidFill>
-          <a:ln w="19050">
-            <a:solidFill>
-              <a:srgbClr val="B07D2B"/>
-            </a:solidFill>
-            <a:prstDash val="solid"/>
-          </a:ln>
-        </p:spPr>
-      </p:sp>
-      <p:sp>
-        <p:nvSpPr>
-          <p:cNvPr id="17" name="Text 14"/>
-          <p:cNvSpPr txBox="1"/>
-          <p:nvPr/>
-        </p:nvSpPr>
-        <p:spPr>
-          <a:xfrm>
-            <a:off x="868680" y="6153912"/>
-            <a:ext cx="10454335" cy="329184"/>
-          </a:xfrm>
-          <a:prstGeom prst="rect">
-            <a:avLst/>
-          </a:prstGeom>
-          <a:noFill/>
-          <a:ln/>
-        </p:spPr>
-        <p:txBody>
-          <a:bodyPr wrap="square" lIns="0" tIns="0" rIns="0" bIns="0" rtlCol="0" anchor="ctr"/>
-          <a:lstStyle/>
-          <a:p>
-            <a:pPr indent="0" marL="0">
-              <a:buNone/>
-            </a:pPr>
-            <a:endParaRPr lang="en-US" sz="1400" dirty="0"/>
-          </a:p>
-        </p:txBody>
-      </p:sp>
-      <p:sp>
-        <p:nvSpPr>
-          <p:cNvPr id="18" name="Text 15"/>
-          <p:cNvSpPr txBox="1"/>
-          <p:nvPr/>
-        </p:nvSpPr>
-        <p:spPr>
-          <a:xfrm>
-            <a:off x="868680" y="6519672"/>
-            <a:ext cx="10454335" cy="-256032"/>
-          </a:xfrm>
-          <a:prstGeom prst="rect">
-            <a:avLst/>
-          </a:prstGeom>
-          <a:noFill/>
-          <a:ln/>
-        </p:spPr>
-        <p:txBody>
-          <a:bodyPr wrap="square" lIns="0" tIns="0" rIns="0" bIns="0" rtlCol="0" anchor="ctr"/>
-          <a:lstStyle/>
-          <a:p>
-            <a:pPr indent="0" marL="0">
-              <a:lnSpc>
-                <a:spcPts val="1700"/>
-              </a:lnSpc>
-              <a:buNone/>
-            </a:pPr>
-            <a:endParaRPr lang="en-US" sz="1250" dirty="0"/>
-          </a:p>
-        </p:txBody>
-      </p:sp>
     </p:spTree>
   </p:cSld>
   <p:clrMapOvr>
@@ -11227,92 +10969,6 @@
               <a:t>People increasingly choose sources that confirm existing views, which reduces shared factual ground.</a:t>
             </a:r>
             <a:endParaRPr lang="en-US" sz="1200" dirty="0"/>
-          </a:p>
-        </p:txBody>
-      </p:sp>
-      <p:sp>
-        <p:nvSpPr>
-          <p:cNvPr id="16" name="Shape 13"/>
-          <p:cNvSpPr/>
-          <p:nvPr/>
-        </p:nvSpPr>
-        <p:spPr>
-          <a:xfrm>
-            <a:off x="594360" y="6172200"/>
-            <a:ext cx="11002975" cy="274320"/>
-          </a:xfrm>
-          <a:prstGeom prst="roundRect">
-            <a:avLst>
-              <a:gd name="adj" fmla="val 23333"/>
-            </a:avLst>
-          </a:prstGeom>
-          <a:solidFill>
-            <a:srgbClr val="FFFFFF"/>
-          </a:solidFill>
-          <a:ln w="19050">
-            <a:solidFill>
-              <a:srgbClr val="B07D2B"/>
-            </a:solidFill>
-            <a:prstDash val="solid"/>
-          </a:ln>
-        </p:spPr>
-      </p:sp>
-      <p:sp>
-        <p:nvSpPr>
-          <p:cNvPr id="17" name="Text 14"/>
-          <p:cNvSpPr txBox="1"/>
-          <p:nvPr/>
-        </p:nvSpPr>
-        <p:spPr>
-          <a:xfrm>
-            <a:off x="868680" y="6336792"/>
-            <a:ext cx="10454335" cy="329184"/>
-          </a:xfrm>
-          <a:prstGeom prst="rect">
-            <a:avLst/>
-          </a:prstGeom>
-          <a:noFill/>
-          <a:ln/>
-        </p:spPr>
-        <p:txBody>
-          <a:bodyPr wrap="square" lIns="0" tIns="0" rIns="0" bIns="0" rtlCol="0" anchor="ctr"/>
-          <a:lstStyle/>
-          <a:p>
-            <a:pPr indent="0" marL="0">
-              <a:buNone/>
-            </a:pPr>
-            <a:endParaRPr lang="en-US" sz="1400" dirty="0"/>
-          </a:p>
-        </p:txBody>
-      </p:sp>
-      <p:sp>
-        <p:nvSpPr>
-          <p:cNvPr id="18" name="Text 15"/>
-          <p:cNvSpPr txBox="1"/>
-          <p:nvPr/>
-        </p:nvSpPr>
-        <p:spPr>
-          <a:xfrm>
-            <a:off x="868680" y="6702552"/>
-            <a:ext cx="10454335" cy="-438912"/>
-          </a:xfrm>
-          <a:prstGeom prst="rect">
-            <a:avLst/>
-          </a:prstGeom>
-          <a:noFill/>
-          <a:ln/>
-        </p:spPr>
-        <p:txBody>
-          <a:bodyPr wrap="square" lIns="0" tIns="0" rIns="0" bIns="0" rtlCol="0" anchor="ctr"/>
-          <a:lstStyle/>
-          <a:p>
-            <a:pPr indent="0" marL="0">
-              <a:lnSpc>
-                <a:spcPts val="1700"/>
-              </a:lnSpc>
-              <a:buNone/>
-            </a:pPr>
-            <a:endParaRPr lang="en-US" sz="1250" dirty="0"/>
           </a:p>
         </p:txBody>
       </p:sp>

--- a/slides/Chapter 15 - Public Opinion and the Media (Lecture Deck).pptx
+++ b/slides/Chapter 15 - Public Opinion and the Media (Lecture Deck).pptx
@@ -1790,7 +1790,9 @@
 rural Texas. Research consistently finds that when local papers close, local
 government borrowing costs rise and contested races decline. Accountability
 depends on someone watching.
-THE TWENTY MARKETS FACT connects to Chapter 9 and campaign cost. It also explains
+THE TWENTY MARKETS FACT (Texas has more Nielsen markets than any other state;
+Dallas-Fort Worth is the nation's fourth-largest and Houston its sixth) connects
+to Chapter 9 and campaign cost. It also explains
 why statewide officials get less scrutiny than students expect: no single outlet
 reaches most Texans.
 THE TEXAS TRIBUNE IS WORTH NAMING because it is free, Texas-specific, and its
@@ -4696,7 +4698,7 @@
                 <a:ea typeface="Calibri" pitchFamily="34" charset="-122"/>
                 <a:cs typeface="Calibri" pitchFamily="34" charset="-120"/>
               </a:rPr>
-              <a:t>Chapter 15 in the Trailblazer Trek: 6 sections, 1,420 points. Students submit the Completion Report.</a:t>
+              <a:t>Chapter 15 in the Trailblazer Trek: 6 sections, 1,230 points. Students submit the Completion Report.</a:t>
             </a:r>
             <a:endParaRPr lang="en-US" sz="1200" dirty="0"/>
           </a:p>
@@ -10121,7 +10123,7 @@
                 <a:ea typeface="Calibri" pitchFamily="34" charset="-122"/>
                 <a:cs typeface="Calibri" pitchFamily="34" charset="-120"/>
               </a:rPr>
-              <a:t>Twenty media markets, the second most of any state. Local stations reach large audiences, with limited statehouse coverage.</a:t>
+              <a:t>Twenty media markets, the most of any state. Local stations reach large audiences, with limited statehouse coverage.</a:t>
             </a:r>
             <a:endParaRPr lang="en-US" sz="1200" dirty="0"/>
           </a:p>
